--- a/classes/parte-2-deep-learning/119-losses-metricas-capas-modelos-custom/clase-119-losses-metricas-capas-modelos-custom-presentacion.pptx
+++ b/classes/parte-2-deep-learning/119-losses-metricas-capas-modelos-custom/clase-119-losses-metricas-capas-modelos-custom-presentacion.pptx
@@ -4866,7 +4866,311 @@
                 </a:solidFill>
                 <a:latin typeface="Courier New"/>
               </a:rPr>
-              <a:t># Imports y configuración inicial</a:t>
+              <a:t>import numpy as np</a:t>
+            </a:r>
+          </a:p>
+          <a:p>
+            <a:pPr>
+              <a:defRPr sz="1200" b="0">
+                <a:solidFill>
+                  <a:srgbClr val="F8FAFC"/>
+                </a:solidFill>
+                <a:latin typeface="Courier New"/>
+              </a:defRPr>
+            </a:pPr>
+            <a:r>
+              <a:rPr sz="1200" b="0">
+                <a:solidFill>
+                  <a:srgbClr val="F8FAFC"/>
+                </a:solidFill>
+                <a:latin typeface="Courier New"/>
+              </a:rPr>
+              <a:t>import tensorflow as tf</a:t>
+            </a:r>
+          </a:p>
+          <a:p>
+            <a:pPr>
+              <a:defRPr sz="1200" b="0">
+                <a:solidFill>
+                  <a:srgbClr val="F8FAFC"/>
+                </a:solidFill>
+                <a:latin typeface="Courier New"/>
+              </a:defRPr>
+            </a:pPr>
+            <a:r>
+              <a:rPr sz="1200" b="0">
+                <a:solidFill>
+                  <a:srgbClr val="F8FAFC"/>
+                </a:solidFill>
+                <a:latin typeface="Courier New"/>
+              </a:rPr>
+              <a:t>from tensorflow import keras</a:t>
+            </a:r>
+          </a:p>
+          <a:p>
+            <a:pPr>
+              <a:defRPr sz="1200" b="0">
+                <a:solidFill>
+                  <a:srgbClr val="F8FAFC"/>
+                </a:solidFill>
+                <a:latin typeface="Courier New"/>
+              </a:defRPr>
+            </a:pPr>
+            <a:r>
+              <a:rPr sz="1200" b="0">
+                <a:solidFill>
+                  <a:srgbClr val="F8FAFC"/>
+                </a:solidFill>
+                <a:latin typeface="Courier New"/>
+              </a:rPr>
+              <a:t>from tensorflow.keras import layers</a:t>
+            </a:r>
+          </a:p>
+          <a:p>
+            <a:pPr>
+              <a:defRPr sz="1200" b="0">
+                <a:solidFill>
+                  <a:srgbClr val="F8FAFC"/>
+                </a:solidFill>
+                <a:latin typeface="Courier New"/>
+              </a:defRPr>
+            </a:pPr>
+            <a:r>
+              <a:rPr sz="1200" b="0">
+                <a:solidFill>
+                  <a:srgbClr val="F8FAFC"/>
+                </a:solidFill>
+                <a:latin typeface="Courier New"/>
+              </a:rPr>
+              <a:t>keras.utils.set_random_seed(42)</a:t>
+            </a:r>
+          </a:p>
+          <a:p>
+            <a:pPr>
+              <a:defRPr sz="1200" b="0">
+                <a:solidFill>
+                  <a:srgbClr val="F8FAFC"/>
+                </a:solidFill>
+                <a:latin typeface="Courier New"/>
+              </a:defRPr>
+            </a:pPr>
+            <a:r>
+              <a:rPr sz="1200" b="0">
+                <a:solidFill>
+                  <a:srgbClr val="F8FAFC"/>
+                </a:solidFill>
+                <a:latin typeface="Courier New"/>
+              </a:rPr>
+              <a:t> </a:t>
+            </a:r>
+          </a:p>
+          <a:p>
+            <a:pPr>
+              <a:defRPr sz="1200" b="0">
+                <a:solidFill>
+                  <a:srgbClr val="F8FAFC"/>
+                </a:solidFill>
+                <a:latin typeface="Courier New"/>
+              </a:defRPr>
+            </a:pPr>
+            <a:r>
+              <a:rPr sz="1200" b="0">
+                <a:solidFill>
+                  <a:srgbClr val="F8FAFC"/>
+                </a:solidFill>
+                <a:latin typeface="Courier New"/>
+              </a:rPr>
+              <a:t>def huber_loss(y_true, y_pred, delta=1.0):</a:t>
+            </a:r>
+          </a:p>
+          <a:p>
+            <a:pPr>
+              <a:defRPr sz="1200" b="0">
+                <a:solidFill>
+                  <a:srgbClr val="F8FAFC"/>
+                </a:solidFill>
+                <a:latin typeface="Courier New"/>
+              </a:defRPr>
+            </a:pPr>
+            <a:r>
+              <a:rPr sz="1200" b="0">
+                <a:solidFill>
+                  <a:srgbClr val="F8FAFC"/>
+                </a:solidFill>
+                <a:latin typeface="Courier New"/>
+              </a:rPr>
+              <a:t>    error = y_true - y_pred</a:t>
+            </a:r>
+          </a:p>
+          <a:p>
+            <a:pPr>
+              <a:defRPr sz="1200" b="0">
+                <a:solidFill>
+                  <a:srgbClr val="F8FAFC"/>
+                </a:solidFill>
+                <a:latin typeface="Courier New"/>
+              </a:defRPr>
+            </a:pPr>
+            <a:r>
+              <a:rPr sz="1200" b="0">
+                <a:solidFill>
+                  <a:srgbClr val="F8FAFC"/>
+                </a:solidFill>
+                <a:latin typeface="Courier New"/>
+              </a:rPr>
+              <a:t>    abs_error = tf.abs(error)</a:t>
+            </a:r>
+          </a:p>
+          <a:p>
+            <a:pPr>
+              <a:defRPr sz="1200" b="0">
+                <a:solidFill>
+                  <a:srgbClr val="F8FAFC"/>
+                </a:solidFill>
+                <a:latin typeface="Courier New"/>
+              </a:defRPr>
+            </a:pPr>
+            <a:r>
+              <a:rPr sz="1200" b="0">
+                <a:solidFill>
+                  <a:srgbClr val="F8FAFC"/>
+                </a:solidFill>
+                <a:latin typeface="Courier New"/>
+              </a:rPr>
+              <a:t>    cuadratica = 0.5 * tf.square(error)</a:t>
+            </a:r>
+          </a:p>
+          <a:p>
+            <a:pPr>
+              <a:defRPr sz="1200" b="0">
+                <a:solidFill>
+                  <a:srgbClr val="F8FAFC"/>
+                </a:solidFill>
+                <a:latin typeface="Courier New"/>
+              </a:defRPr>
+            </a:pPr>
+            <a:r>
+              <a:rPr sz="1200" b="0">
+                <a:solidFill>
+                  <a:srgbClr val="F8FAFC"/>
+                </a:solidFill>
+                <a:latin typeface="Courier New"/>
+              </a:rPr>
+              <a:t>    lineal = delta * (abs_error - 0.5 * delta)</a:t>
+            </a:r>
+          </a:p>
+          <a:p>
+            <a:pPr>
+              <a:defRPr sz="1200" b="0">
+                <a:solidFill>
+                  <a:srgbClr val="F8FAFC"/>
+                </a:solidFill>
+                <a:latin typeface="Courier New"/>
+              </a:defRPr>
+            </a:pPr>
+            <a:r>
+              <a:rPr sz="1200" b="0">
+                <a:solidFill>
+                  <a:srgbClr val="F8FAFC"/>
+                </a:solidFill>
+                <a:latin typeface="Courier New"/>
+              </a:rPr>
+              <a:t>    return tf.where(abs_error &lt;= delta, cuadratica, lineal)</a:t>
+            </a:r>
+          </a:p>
+          <a:p>
+            <a:pPr>
+              <a:defRPr sz="1200" b="0">
+                <a:solidFill>
+                  <a:srgbClr val="F8FAFC"/>
+                </a:solidFill>
+                <a:latin typeface="Courier New"/>
+              </a:defRPr>
+            </a:pPr>
+            <a:r>
+              <a:rPr sz="1200" b="0">
+                <a:solidFill>
+                  <a:srgbClr val="F8FAFC"/>
+                </a:solidFill>
+                <a:latin typeface="Courier New"/>
+              </a:rPr>
+              <a:t> </a:t>
+            </a:r>
+          </a:p>
+          <a:p>
+            <a:pPr>
+              <a:defRPr sz="1200" b="0">
+                <a:solidFill>
+                  <a:srgbClr val="F8FAFC"/>
+                </a:solidFill>
+                <a:latin typeface="Courier New"/>
+              </a:defRPr>
+            </a:pPr>
+            <a:r>
+              <a:rPr sz="1200" b="0">
+                <a:solidFill>
+                  <a:srgbClr val="F8FAFC"/>
+                </a:solidFill>
+                <a:latin typeface="Courier New"/>
+              </a:rPr>
+              <a:t>y_true = tf.constant([0.0, 1.0, 2.0, 5.0])</a:t>
+            </a:r>
+          </a:p>
+          <a:p>
+            <a:pPr>
+              <a:defRPr sz="1200" b="0">
+                <a:solidFill>
+                  <a:srgbClr val="F8FAFC"/>
+                </a:solidFill>
+                <a:latin typeface="Courier New"/>
+              </a:defRPr>
+            </a:pPr>
+            <a:r>
+              <a:rPr sz="1200" b="0">
+                <a:solidFill>
+                  <a:srgbClr val="F8FAFC"/>
+                </a:solidFill>
+                <a:latin typeface="Courier New"/>
+              </a:rPr>
+              <a:t>y_pred = tf.constant([0.2, 0.9, 4.0, 5.1])</a:t>
+            </a:r>
+          </a:p>
+          <a:p>
+            <a:pPr>
+              <a:defRPr sz="1200" b="0">
+                <a:solidFill>
+                  <a:srgbClr val="F8FAFC"/>
+                </a:solidFill>
+                <a:latin typeface="Courier New"/>
+              </a:defRPr>
+            </a:pPr>
+            <a:r>
+              <a:rPr sz="1200" b="0">
+                <a:solidFill>
+                  <a:srgbClr val="F8FAFC"/>
+                </a:solidFill>
+                <a:latin typeface="Courier New"/>
+              </a:rPr>
+              <a:t>print("Huber por sample:", huber_loss(y_true, y_pred).numpy())</a:t>
+            </a:r>
+          </a:p>
+          <a:p>
+            <a:pPr>
+              <a:defRPr sz="1200" b="0">
+                <a:solidFill>
+                  <a:srgbClr val="F8FAFC"/>
+                </a:solidFill>
+                <a:latin typeface="Courier New"/>
+              </a:defRPr>
+            </a:pPr>
+            <a:r>
+              <a:rPr sz="1200" b="0">
+                <a:solidFill>
+                  <a:srgbClr val="F8FAFC"/>
+                </a:solidFill>
+                <a:latin typeface="Courier New"/>
+              </a:rPr>
+              <a:t>print("Huber media:", float(tf.reduce_mean(huber_loss(y_true, y_pred))))</a:t>
             </a:r>
           </a:p>
         </p:txBody>

--- a/classes/parte-2-deep-learning/119-losses-metricas-capas-modelos-custom/clase-119-losses-metricas-capas-modelos-custom-presentacion.pptx
+++ b/classes/parte-2-deep-learning/119-losses-metricas-capas-modelos-custom/clase-119-losses-metricas-capas-modelos-custom-presentacion.pptx
@@ -3272,7 +3272,7 @@
                 </a:solidFill>
                 <a:latin typeface="Segoe UI"/>
               </a:rPr>
-              <a:t>Parte: 2 — Deep Learning · Fuente: Géron, cap. 12 § Customizing Models and Training Algorithms.  Duración estimada: 70 min.</a:t>
+              <a:t>Parte: 2 — Deep Learning · Fuente: Géron, cap. 12 § Customizing Models and Training Algorithms.  Duración estimada: 70 min. · Nivel: Avanzado</a:t>
             </a:r>
           </a:p>
         </p:txBody>
@@ -3581,7 +3581,7 @@
                 </a:solidFill>
                 <a:latin typeface="Segoe UI"/>
               </a:rPr>
-              <a:t>Parte: 2 — Deep Learning · Fuente: Géron, cap. 12 § Customizing Models and Training Algorithms.  Duración estimada: 70 min.</a:t>
+              <a:t>Parte: 2 — Deep Learning · Fuente: Géron, cap. 12 § Customizing Models and Training Algorithms.  Duración estimada: 70 min. · Nivel: Avanzado</a:t>
             </a:r>
           </a:p>
         </p:txBody>
